--- a/slides/free5gc_kamailio_integration.pptx
+++ b/slides/free5gc_kamailio_integration.pptx
@@ -15,7 +15,7 @@
     <p:sldId id="263" r:id="rId9"/>
     <p:sldId id="264" r:id="rId10"/>
     <p:sldId id="265" r:id="rId11"/>
-    <p:sldId id="266" r:id="rId12"/>
+    <p:sldId id="268" r:id="rId14"/>
     <p:sldId id="267" r:id="rId13"/>
   </p:sldIdLst>
   <p:sldSz cx="12192000" cy="6858000"/>
@@ -967,634 +967,6 @@
 </p:sld>
 </file>
 
-<file path=ppt/slides/slide11.xml><?xml version="1.0" encoding="utf-8"?>
-<p:sld xmlns:a="http://schemas.openxmlformats.org/drawingml/2006/main" xmlns:r="http://schemas.openxmlformats.org/officeDocument/2006/relationships" xmlns:p="http://schemas.openxmlformats.org/presentationml/2006/main">
-  <p:cSld>
-    <p:bg>
-      <p:bgPr>
-        <a:solidFill>
-          <a:srgbClr val="F6F7F9"/>
-        </a:solidFill>
-        <a:effectLst/>
-      </p:bgPr>
-    </p:bg>
-    <p:spTree>
-      <p:nvGrpSpPr>
-        <p:cNvPr id="1" name=""/>
-        <p:cNvGrpSpPr/>
-        <p:nvPr/>
-      </p:nvGrpSpPr>
-      <p:grpSpPr>
-        <a:xfrm>
-          <a:off x="0" y="0"/>
-          <a:ext cx="0" cy="0"/>
-          <a:chOff x="0" y="0"/>
-          <a:chExt cx="0" cy="0"/>
-        </a:xfrm>
-      </p:grpSpPr>
-      <p:sp>
-        <p:nvSpPr>
-          <p:cNvPr id="3" name="Shape 3">
-            <a:extLst>
-              <a:ext uri="{FF2B5EF4-FFF2-40B4-BE49-F238E27FC236}">
-                <a16:creationId xmlns:a16="http://schemas.microsoft.com/office/drawing/2014/main" id="{AF3E1DE9-C201-48EB-9087-9526ABB9D3C8}"/>
-              </a:ext>
-            </a:extLst>
-          </p:cNvPr>
-          <p:cNvSpPr/>
-          <p:nvPr/>
-        </p:nvSpPr>
-        <p:spPr>
-          <a:xfrm>
-            <a:off x="0" y="0"/>
-            <a:ext cx="3810000" cy="6858000"/>
-          </a:xfrm>
-          <a:prstGeom prst="rect">
-            <a:avLst/>
-          </a:prstGeom>
-          <a:solidFill>
-            <a:srgbClr val="0F4C81"/>
-          </a:solidFill>
-        </p:spPr>
-        <p:txBody>
-          <a:bodyPr wrap="square" rtlCol="0"/>
-          <a:lstStyle/>
-          <a:p>
-            <a:r>
-              <a:rPr/>
-              <a:t/>
-            </a:r>
-          </a:p>
-        </p:txBody>
-      </p:sp>
-      <p:sp>
-        <p:nvSpPr>
-          <p:cNvPr id="4" name="TextBox 4">
-            <a:extLst>
-              <a:ext uri="{FF2B5EF4-FFF2-40B4-BE49-F238E27FC236}">
-                <a16:creationId xmlns:a16="http://schemas.microsoft.com/office/drawing/2014/main" id="{FC0BEEB0-DB35-45BE-92E7-AFED61FBBA77}"/>
-              </a:ext>
-            </a:extLst>
-          </p:cNvPr>
-          <p:cNvSpPr txBox="1"/>
-          <p:nvPr/>
-        </p:nvSpPr>
-        <p:spPr>
-          <a:xfrm>
-            <a:off x="476250" y="1428750"/>
-            <a:ext cx="3048000" cy="2438400"/>
-          </a:xfrm>
-        </p:spPr>
-        <p:txBody>
-          <a:bodyPr wrap="square" rtlCol="0" lIns="0" tIns="0" rIns="0" bIns="0" anchor="t">
-            <a:spAutoFit/>
-          </a:bodyPr>
-          <a:lstStyle/>
-          <a:p>
-            <a:r>
-              <a:rPr sz="16000" b="1">
-                <a:solidFill>
-                  <a:srgbClr val="FFFFFF"/>
-                </a:solidFill>
-              </a:rPr>
-              <a:t>6</a:t>
-            </a:r>
-          </a:p>
-        </p:txBody>
-      </p:sp>
-      <p:sp>
-        <p:nvSpPr>
-          <p:cNvPr id="5" name="TextBox 5">
-            <a:extLst>
-              <a:ext uri="{FF2B5EF4-FFF2-40B4-BE49-F238E27FC236}">
-                <a16:creationId xmlns:a16="http://schemas.microsoft.com/office/drawing/2014/main" id="{1E2D8A7F-749C-4AF6-95E8-8F061EE2A21E}"/>
-              </a:ext>
-            </a:extLst>
-          </p:cNvPr>
-          <p:cNvSpPr txBox="1"/>
-          <p:nvPr/>
-        </p:nvSpPr>
-        <p:spPr>
-          <a:xfrm>
-            <a:off x="476250" y="4095750"/>
-            <a:ext cx="3048000" cy="1333500"/>
-          </a:xfrm>
-        </p:spPr>
-        <p:txBody>
-          <a:bodyPr wrap="square" rtlCol="0" lIns="0" tIns="0" rIns="0" bIns="0" anchor="t">
-            <a:spAutoFit/>
-          </a:bodyPr>
-          <a:lstStyle/>
-          <a:p>
-            <a:pPr>
-              <a:spcAft>
-                <a:spcPts val="800"/>
-              </a:spcAft>
-            </a:pPr>
-            <a:r>
-              <a:rPr sz="2400" b="1">
-                <a:solidFill>
-                  <a:srgbClr val="FFFFFF"/>
-                </a:solidFill>
-              </a:rPr>
-              <a:t>個還沒打通的地方</a:t>
-            </a:r>
-          </a:p>
-          <a:p>
-            <a:r>
-              <a:rPr sz="1500">
-                <a:solidFill>
-                  <a:srgbClr val="C9D3E0"/>
-                </a:solidFill>
-              </a:rPr>
-              <a:t>前兩個影響最大</a:t>
-            </a:r>
-          </a:p>
-        </p:txBody>
-      </p:sp>
-      <p:sp>
-        <p:nvSpPr>
-          <p:cNvPr id="6" name="TextBox 6">
-            <a:extLst>
-              <a:ext uri="{FF2B5EF4-FFF2-40B4-BE49-F238E27FC236}">
-                <a16:creationId xmlns:a16="http://schemas.microsoft.com/office/drawing/2014/main" id="{46D870BA-DE7D-42D1-B3B2-7812C2347C7E}"/>
-              </a:ext>
-            </a:extLst>
-          </p:cNvPr>
-          <p:cNvSpPr txBox="1"/>
-          <p:nvPr/>
-        </p:nvSpPr>
-        <p:spPr>
-          <a:xfrm>
-            <a:off x="4286250" y="571500"/>
-            <a:ext cx="7239000" cy="762000"/>
-          </a:xfrm>
-        </p:spPr>
-        <p:txBody>
-          <a:bodyPr wrap="square" rtlCol="0" lIns="0" tIns="0" rIns="0" bIns="0" anchor="t">
-            <a:spAutoFit/>
-          </a:bodyPr>
-          <a:lstStyle/>
-          <a:p>
-            <a:pPr>
-              <a:spcAft>
-                <a:spcPts val="400"/>
-              </a:spcAft>
-            </a:pPr>
-            <a:r>
-              <a:rPr sz="1900" b="1">
-                <a:solidFill>
-                  <a:srgbClr val="E8742A"/>
-                </a:solidFill>
-              </a:rPr>
-              <a:t>SMF 沒送 N1N2</a:t>
-            </a:r>
-          </a:p>
-          <a:p>
-            <a:r>
-              <a:rPr sz="1500">
-                <a:solidFill>
-                  <a:srgbClr val="5B6575"/>
-                </a:solidFill>
-              </a:rPr>
-              <a:t>policy 更新只改 UPF，gNB 與 UE 不知道語音 QoS flow</a:t>
-            </a:r>
-          </a:p>
-        </p:txBody>
-      </p:sp>
-      <p:sp>
-        <p:nvSpPr>
-          <p:cNvPr id="7" name="Shape 7">
-            <a:extLst>
-              <a:ext uri="{FF2B5EF4-FFF2-40B4-BE49-F238E27FC236}">
-                <a16:creationId xmlns:a16="http://schemas.microsoft.com/office/drawing/2014/main" id="{28D0D2CC-7F3D-4CC5-BBD4-1A903635D993}"/>
-              </a:ext>
-            </a:extLst>
-          </p:cNvPr>
-          <p:cNvSpPr/>
-          <p:nvPr/>
-        </p:nvSpPr>
-        <p:spPr>
-          <a:xfrm>
-            <a:off x="4286250" y="1409700"/>
-            <a:ext cx="7239000" cy="9525"/>
-          </a:xfrm>
-          <a:prstGeom prst="rect">
-            <a:avLst/>
-          </a:prstGeom>
-          <a:solidFill>
-            <a:srgbClr val="D5DAE1"/>
-          </a:solidFill>
-        </p:spPr>
-        <p:txBody>
-          <a:bodyPr wrap="square" rtlCol="0"/>
-          <a:lstStyle/>
-          <a:p>
-            <a:r>
-              <a:rPr/>
-              <a:t/>
-            </a:r>
-          </a:p>
-        </p:txBody>
-      </p:sp>
-      <p:sp>
-        <p:nvSpPr>
-          <p:cNvPr id="8" name="TextBox 8">
-            <a:extLst>
-              <a:ext uri="{FF2B5EF4-FFF2-40B4-BE49-F238E27FC236}">
-                <a16:creationId xmlns:a16="http://schemas.microsoft.com/office/drawing/2014/main" id="{CB93784F-3462-4B80-B578-281D38B9612A}"/>
-              </a:ext>
-            </a:extLst>
-          </p:cNvPr>
-          <p:cNvSpPr txBox="1"/>
-          <p:nvPr/>
-        </p:nvSpPr>
-        <p:spPr>
-          <a:xfrm>
-            <a:off x="4286250" y="1524000"/>
-            <a:ext cx="7239000" cy="762000"/>
-          </a:xfrm>
-        </p:spPr>
-        <p:txBody>
-          <a:bodyPr wrap="square" rtlCol="0" lIns="0" tIns="0" rIns="0" bIns="0" anchor="t">
-            <a:spAutoFit/>
-          </a:bodyPr>
-          <a:lstStyle/>
-          <a:p>
-            <a:pPr>
-              <a:spcAft>
-                <a:spcPts val="400"/>
-              </a:spcAft>
-            </a:pPr>
-            <a:r>
-              <a:rPr sz="1900" b="1">
-                <a:solidFill>
-                  <a:srgbClr val="E8742A"/>
-                </a:solidFill>
-              </a:rPr>
-              <a:t>PCF 通知只寫 log</a:t>
-            </a:r>
-          </a:p>
-          <a:p>
-            <a:r>
-              <a:rPr sz="1500">
-                <a:solidFill>
-                  <a:srgbClr val="5B6575"/>
-                </a:solidFill>
-              </a:rPr>
-              <a:t>PDU session 斷了，通話還掛著</a:t>
-            </a:r>
-          </a:p>
-        </p:txBody>
-      </p:sp>
-      <p:sp>
-        <p:nvSpPr>
-          <p:cNvPr id="9" name="Shape 9">
-            <a:extLst>
-              <a:ext uri="{FF2B5EF4-FFF2-40B4-BE49-F238E27FC236}">
-                <a16:creationId xmlns:a16="http://schemas.microsoft.com/office/drawing/2014/main" id="{5EF360B3-ADFF-40BF-B6AF-DDFDE8C12FFF}"/>
-              </a:ext>
-            </a:extLst>
-          </p:cNvPr>
-          <p:cNvSpPr/>
-          <p:nvPr/>
-        </p:nvSpPr>
-        <p:spPr>
-          <a:xfrm>
-            <a:off x="4286250" y="2362200"/>
-            <a:ext cx="7239000" cy="9525"/>
-          </a:xfrm>
-          <a:prstGeom prst="rect">
-            <a:avLst/>
-          </a:prstGeom>
-          <a:solidFill>
-            <a:srgbClr val="D5DAE1"/>
-          </a:solidFill>
-        </p:spPr>
-        <p:txBody>
-          <a:bodyPr wrap="square" rtlCol="0"/>
-          <a:lstStyle/>
-          <a:p>
-            <a:r>
-              <a:rPr/>
-              <a:t/>
-            </a:r>
-          </a:p>
-        </p:txBody>
-      </p:sp>
-      <p:sp>
-        <p:nvSpPr>
-          <p:cNvPr id="10" name="TextBox 10">
-            <a:extLst>
-              <a:ext uri="{FF2B5EF4-FFF2-40B4-BE49-F238E27FC236}">
-                <a16:creationId xmlns:a16="http://schemas.microsoft.com/office/drawing/2014/main" id="{4ED292D6-24FE-45EF-A2C3-4AE60EB4967B}"/>
-              </a:ext>
-            </a:extLst>
-          </p:cNvPr>
-          <p:cNvSpPr txBox="1"/>
-          <p:nvPr/>
-        </p:nvSpPr>
-        <p:spPr>
-          <a:xfrm>
-            <a:off x="4286250" y="2476500"/>
-            <a:ext cx="7239000" cy="762000"/>
-          </a:xfrm>
-        </p:spPr>
-        <p:txBody>
-          <a:bodyPr wrap="square" rtlCol="0" lIns="0" tIns="0" rIns="0" bIns="0" anchor="t">
-            <a:spAutoFit/>
-          </a:bodyPr>
-          <a:lstStyle/>
-          <a:p>
-            <a:pPr>
-              <a:spcAft>
-                <a:spcPts val="400"/>
-              </a:spcAft>
-            </a:pPr>
-            <a:r>
-              <a:rPr sz="1900" b="1">
-                <a:solidFill>
-                  <a:srgbClr val="14213D"/>
-                </a:solidFill>
-              </a:rPr>
-              <a:t>註冊時沒交換資訊</a:t>
-            </a:r>
-          </a:p>
-          <a:p>
-            <a:r>
-              <a:rPr sz="1500">
-                <a:solidFill>
-                  <a:srgbClr val="5B6575"/>
-                </a:solidFill>
-              </a:rPr>
-              <a:t>沒有信令 flow、事件訂閱（29.513 B.5–B.8）</a:t>
-            </a:r>
-          </a:p>
-        </p:txBody>
-      </p:sp>
-      <p:sp>
-        <p:nvSpPr>
-          <p:cNvPr id="11" name="Shape 11">
-            <a:extLst>
-              <a:ext uri="{FF2B5EF4-FFF2-40B4-BE49-F238E27FC236}">
-                <a16:creationId xmlns:a16="http://schemas.microsoft.com/office/drawing/2014/main" id="{0FFE6EC1-D566-4351-8B31-93CEA3038847}"/>
-              </a:ext>
-            </a:extLst>
-          </p:cNvPr>
-          <p:cNvSpPr/>
-          <p:nvPr/>
-        </p:nvSpPr>
-        <p:spPr>
-          <a:xfrm>
-            <a:off x="4286250" y="3314700"/>
-            <a:ext cx="7239000" cy="9525"/>
-          </a:xfrm>
-          <a:prstGeom prst="rect">
-            <a:avLst/>
-          </a:prstGeom>
-          <a:solidFill>
-            <a:srgbClr val="D5DAE1"/>
-          </a:solidFill>
-        </p:spPr>
-        <p:txBody>
-          <a:bodyPr wrap="square" rtlCol="0"/>
-          <a:lstStyle/>
-          <a:p>
-            <a:r>
-              <a:rPr/>
-              <a:t/>
-            </a:r>
-          </a:p>
-        </p:txBody>
-      </p:sp>
-      <p:sp>
-        <p:nvSpPr>
-          <p:cNvPr id="12" name="TextBox 12">
-            <a:extLst>
-              <a:ext uri="{FF2B5EF4-FFF2-40B4-BE49-F238E27FC236}">
-                <a16:creationId xmlns:a16="http://schemas.microsoft.com/office/drawing/2014/main" id="{A9A05B8A-EBEC-425A-A7C6-4FDE5428EBCC}"/>
-              </a:ext>
-            </a:extLst>
-          </p:cNvPr>
-          <p:cNvSpPr txBox="1"/>
-          <p:nvPr/>
-        </p:nvSpPr>
-        <p:spPr>
-          <a:xfrm>
-            <a:off x="4286250" y="3429000"/>
-            <a:ext cx="7239000" cy="762000"/>
-          </a:xfrm>
-        </p:spPr>
-        <p:txBody>
-          <a:bodyPr wrap="square" rtlCol="0" lIns="0" tIns="0" rIns="0" bIns="0" anchor="t">
-            <a:spAutoFit/>
-          </a:bodyPr>
-          <a:lstStyle/>
-          <a:p>
-            <a:pPr>
-              <a:spcAft>
-                <a:spcPts val="400"/>
-              </a:spcAft>
-            </a:pPr>
-            <a:r>
-              <a:rPr sz="1900" b="1">
-                <a:solidFill>
-                  <a:srgbClr val="14213D"/>
-                </a:solidFill>
-              </a:rPr>
-              <a:t>AMF imsVoPS = 0</a:t>
-            </a:r>
-          </a:p>
-          <a:p>
-            <a:r>
-              <a:rPr sz="1500">
-                <a:solidFill>
-                  <a:srgbClr val="5B6575"/>
-                </a:solidFill>
-              </a:rPr>
-              <a:t>網路告訴 UE 不支援 IMS 語音</a:t>
-            </a:r>
-          </a:p>
-        </p:txBody>
-      </p:sp>
-      <p:sp>
-        <p:nvSpPr>
-          <p:cNvPr id="13" name="Shape 13">
-            <a:extLst>
-              <a:ext uri="{FF2B5EF4-FFF2-40B4-BE49-F238E27FC236}">
-                <a16:creationId xmlns:a16="http://schemas.microsoft.com/office/drawing/2014/main" id="{D0EE474E-C1A2-4F63-B12A-F3619B73A5A3}"/>
-              </a:ext>
-            </a:extLst>
-          </p:cNvPr>
-          <p:cNvSpPr/>
-          <p:nvPr/>
-        </p:nvSpPr>
-        <p:spPr>
-          <a:xfrm>
-            <a:off x="4286250" y="4267200"/>
-            <a:ext cx="7239000" cy="9525"/>
-          </a:xfrm>
-          <a:prstGeom prst="rect">
-            <a:avLst/>
-          </a:prstGeom>
-          <a:solidFill>
-            <a:srgbClr val="D5DAE1"/>
-          </a:solidFill>
-        </p:spPr>
-        <p:txBody>
-          <a:bodyPr wrap="square" rtlCol="0"/>
-          <a:lstStyle/>
-          <a:p>
-            <a:r>
-              <a:rPr/>
-              <a:t/>
-            </a:r>
-          </a:p>
-        </p:txBody>
-      </p:sp>
-      <p:sp>
-        <p:nvSpPr>
-          <p:cNvPr id="14" name="TextBox 14">
-            <a:extLst>
-              <a:ext uri="{FF2B5EF4-FFF2-40B4-BE49-F238E27FC236}">
-                <a16:creationId xmlns:a16="http://schemas.microsoft.com/office/drawing/2014/main" id="{A5A97E99-DED9-4F4B-A397-B04A0CB83EEE}"/>
-              </a:ext>
-            </a:extLst>
-          </p:cNvPr>
-          <p:cNvSpPr txBox="1"/>
-          <p:nvPr/>
-        </p:nvSpPr>
-        <p:spPr>
-          <a:xfrm>
-            <a:off x="4286250" y="4381500"/>
-            <a:ext cx="7239000" cy="762000"/>
-          </a:xfrm>
-        </p:spPr>
-        <p:txBody>
-          <a:bodyPr wrap="square" rtlCol="0" lIns="0" tIns="0" rIns="0" bIns="0" anchor="t">
-            <a:spAutoFit/>
-          </a:bodyPr>
-          <a:lstStyle/>
-          <a:p>
-            <a:pPr>
-              <a:spcAft>
-                <a:spcPts val="400"/>
-              </a:spcAft>
-            </a:pPr>
-            <a:r>
-              <a:rPr sz="1900" b="1">
-                <a:solidFill>
-                  <a:srgbClr val="14213D"/>
-                </a:solidFill>
-              </a:rPr>
-              <a:t>PCO 只有 IPv4</a:t>
-            </a:r>
-          </a:p>
-          <a:p>
-            <a:r>
-              <a:rPr sz="1500">
-                <a:solidFill>
-                  <a:srgbClr val="5B6575"/>
-                </a:solidFill>
-              </a:rPr>
-              <a:t>沒有 IPv6 P-CSCF</a:t>
-            </a:r>
-          </a:p>
-        </p:txBody>
-      </p:sp>
-      <p:sp>
-        <p:nvSpPr>
-          <p:cNvPr id="15" name="Shape 15">
-            <a:extLst>
-              <a:ext uri="{FF2B5EF4-FFF2-40B4-BE49-F238E27FC236}">
-                <a16:creationId xmlns:a16="http://schemas.microsoft.com/office/drawing/2014/main" id="{E5651379-1DE7-4792-96BD-275202432D74}"/>
-              </a:ext>
-            </a:extLst>
-          </p:cNvPr>
-          <p:cNvSpPr/>
-          <p:nvPr/>
-        </p:nvSpPr>
-        <p:spPr>
-          <a:xfrm>
-            <a:off x="4286250" y="5219700"/>
-            <a:ext cx="7239000" cy="9525"/>
-          </a:xfrm>
-          <a:prstGeom prst="rect">
-            <a:avLst/>
-          </a:prstGeom>
-          <a:solidFill>
-            <a:srgbClr val="D5DAE1"/>
-          </a:solidFill>
-        </p:spPr>
-        <p:txBody>
-          <a:bodyPr wrap="square" rtlCol="0"/>
-          <a:lstStyle/>
-          <a:p>
-            <a:r>
-              <a:rPr/>
-              <a:t/>
-            </a:r>
-          </a:p>
-        </p:txBody>
-      </p:sp>
-      <p:sp>
-        <p:nvSpPr>
-          <p:cNvPr id="16" name="TextBox 16">
-            <a:extLst>
-              <a:ext uri="{FF2B5EF4-FFF2-40B4-BE49-F238E27FC236}">
-                <a16:creationId xmlns:a16="http://schemas.microsoft.com/office/drawing/2014/main" id="{CD0C1D45-5830-48B1-8E5F-1C048E19A90A}"/>
-              </a:ext>
-            </a:extLst>
-          </p:cNvPr>
-          <p:cNvSpPr txBox="1"/>
-          <p:nvPr/>
-        </p:nvSpPr>
-        <p:spPr>
-          <a:xfrm>
-            <a:off x="4286250" y="5334000"/>
-            <a:ext cx="7239000" cy="762000"/>
-          </a:xfrm>
-        </p:spPr>
-        <p:txBody>
-          <a:bodyPr wrap="square" rtlCol="0" lIns="0" tIns="0" rIns="0" bIns="0" anchor="t">
-            <a:spAutoFit/>
-          </a:bodyPr>
-          <a:lstStyle/>
-          <a:p>
-            <a:pPr>
-              <a:spcAft>
-                <a:spcPts val="400"/>
-              </a:spcAft>
-            </a:pPr>
-            <a:r>
-              <a:rPr sz="1900" b="1">
-                <a:solidFill>
-                  <a:srgbClr val="14213D"/>
-                </a:solidFill>
-              </a:rPr>
-              <a:t>QER 不真的限速</a:t>
-            </a:r>
-          </a:p>
-          <a:p>
-            <a:r>
-              <a:rPr sz="1500">
-                <a:solidFill>
-                  <a:srgbClr val="5B6575"/>
-                </a:solidFill>
-              </a:rPr>
-              <a:t>free5gc 的已知限制</a:t>
-            </a:r>
-          </a:p>
-        </p:txBody>
-      </p:sp>
-    </p:spTree>
-  </p:cSld>
-  <p:clrMapOvr>
-    <a:masterClrMapping/>
-  </p:clrMapOvr>
-</p:sld>
-</file>
-
 <file path=ppt/slides/slide12.xml><?xml version="1.0" encoding="utf-8"?>
 <p:sld xmlns:a="http://schemas.openxmlformats.org/drawingml/2006/main" xmlns:r="http://schemas.openxmlformats.org/officeDocument/2006/relationships" xmlns:p="http://schemas.openxmlformats.org/presentationml/2006/main">
   <p:cSld>
@@ -2119,6 +1491,634 @@
                 </a:solidFill>
               </a:rPr>
               <a:t>TS 24.008  PCO</a:t>
+            </a:r>
+          </a:p>
+        </p:txBody>
+      </p:sp>
+    </p:spTree>
+  </p:cSld>
+  <p:clrMapOvr>
+    <a:masterClrMapping/>
+  </p:clrMapOvr>
+</p:sld>
+</file>
+
+<file path=ppt/slides/slide13.xml><?xml version="1.0" encoding="utf-8"?>
+<p:sld xmlns:a="http://schemas.openxmlformats.org/drawingml/2006/main" xmlns:r="http://schemas.openxmlformats.org/officeDocument/2006/relationships" xmlns:p="http://schemas.openxmlformats.org/presentationml/2006/main">
+  <p:cSld>
+    <p:bg>
+      <p:bgPr>
+        <a:solidFill>
+          <a:srgbClr val="F6F7F9"/>
+        </a:solidFill>
+        <a:effectLst/>
+      </p:bgPr>
+    </p:bg>
+    <p:spTree>
+      <p:nvGrpSpPr>
+        <p:cNvPr id="1" name=""/>
+        <p:cNvGrpSpPr/>
+        <p:nvPr/>
+      </p:nvGrpSpPr>
+      <p:grpSpPr>
+        <a:xfrm>
+          <a:off x="0" y="0"/>
+          <a:ext cx="0" cy="0"/>
+          <a:chOff x="0" y="0"/>
+          <a:chExt cx="0" cy="0"/>
+        </a:xfrm>
+      </p:grpSpPr>
+      <p:sp>
+        <p:nvSpPr>
+          <p:cNvPr id="3" name="Shape 3">
+            <a:extLst>
+              <a:ext uri="{FF2B5EF4-FFF2-40B4-BE49-F238E27FC236}">
+                <a16:creationId xmlns:a16="http://schemas.microsoft.com/office/drawing/2014/main" id="{0F3455E7-262E-4B94-A35B-09C55F3BE6C8}"/>
+              </a:ext>
+            </a:extLst>
+          </p:cNvPr>
+          <p:cNvSpPr/>
+          <p:nvPr/>
+        </p:nvSpPr>
+        <p:spPr>
+          <a:xfrm>
+            <a:off x="0" y="0"/>
+            <a:ext cx="3810000" cy="6858000"/>
+          </a:xfrm>
+          <a:prstGeom prst="rect">
+            <a:avLst/>
+          </a:prstGeom>
+          <a:solidFill>
+            <a:srgbClr val="0F4C81"/>
+          </a:solidFill>
+        </p:spPr>
+        <p:txBody>
+          <a:bodyPr wrap="square" rtlCol="0"/>
+          <a:lstStyle/>
+          <a:p>
+            <a:r>
+              <a:rPr/>
+              <a:t/>
+            </a:r>
+          </a:p>
+        </p:txBody>
+      </p:sp>
+      <p:sp>
+        <p:nvSpPr>
+          <p:cNvPr id="4" name="TextBox 4">
+            <a:extLst>
+              <a:ext uri="{FF2B5EF4-FFF2-40B4-BE49-F238E27FC236}">
+                <a16:creationId xmlns:a16="http://schemas.microsoft.com/office/drawing/2014/main" id="{E7F9A9E0-B608-4E7C-B94D-35902B7C4789}"/>
+              </a:ext>
+            </a:extLst>
+          </p:cNvPr>
+          <p:cNvSpPr txBox="1"/>
+          <p:nvPr/>
+        </p:nvSpPr>
+        <p:spPr>
+          <a:xfrm>
+            <a:off x="476250" y="1428750"/>
+            <a:ext cx="3048000" cy="2438400"/>
+          </a:xfrm>
+        </p:spPr>
+        <p:txBody>
+          <a:bodyPr wrap="square" rtlCol="0" lIns="0" tIns="0" rIns="0" bIns="0" anchor="t">
+            <a:spAutoFit/>
+          </a:bodyPr>
+          <a:lstStyle/>
+          <a:p>
+            <a:r>
+              <a:rPr sz="16000" b="1">
+                <a:solidFill>
+                  <a:srgbClr val="FFFFFF"/>
+                </a:solidFill>
+              </a:rPr>
+              <a:t>6</a:t>
+            </a:r>
+          </a:p>
+        </p:txBody>
+      </p:sp>
+      <p:sp>
+        <p:nvSpPr>
+          <p:cNvPr id="5" name="TextBox 5">
+            <a:extLst>
+              <a:ext uri="{FF2B5EF4-FFF2-40B4-BE49-F238E27FC236}">
+                <a16:creationId xmlns:a16="http://schemas.microsoft.com/office/drawing/2014/main" id="{C32623DE-9B8E-4419-A16B-768742BAED22}"/>
+              </a:ext>
+            </a:extLst>
+          </p:cNvPr>
+          <p:cNvSpPr txBox="1"/>
+          <p:nvPr/>
+        </p:nvSpPr>
+        <p:spPr>
+          <a:xfrm>
+            <a:off x="476250" y="4095750"/>
+            <a:ext cx="3048000" cy="1333500"/>
+          </a:xfrm>
+        </p:spPr>
+        <p:txBody>
+          <a:bodyPr wrap="square" rtlCol="0" lIns="0" tIns="0" rIns="0" bIns="0" anchor="t">
+            <a:spAutoFit/>
+          </a:bodyPr>
+          <a:lstStyle/>
+          <a:p>
+            <a:pPr>
+              <a:spcAft>
+                <a:spcPts val="800"/>
+              </a:spcAft>
+            </a:pPr>
+            <a:r>
+              <a:rPr sz="2400" b="1">
+                <a:solidFill>
+                  <a:srgbClr val="FFFFFF"/>
+                </a:solidFill>
+              </a:rPr>
+              <a:t>個還沒打通的地方</a:t>
+            </a:r>
+          </a:p>
+          <a:p>
+            <a:r>
+              <a:rPr sz="1500">
+                <a:solidFill>
+                  <a:srgbClr val="C9D3E0"/>
+                </a:solidFill>
+              </a:rPr>
+              <a:t>前兩個影響最大</a:t>
+            </a:r>
+          </a:p>
+        </p:txBody>
+      </p:sp>
+      <p:sp>
+        <p:nvSpPr>
+          <p:cNvPr id="6" name="TextBox 6">
+            <a:extLst>
+              <a:ext uri="{FF2B5EF4-FFF2-40B4-BE49-F238E27FC236}">
+                <a16:creationId xmlns:a16="http://schemas.microsoft.com/office/drawing/2014/main" id="{0508BBC4-06BA-4178-A466-BE437EDCD5A2}"/>
+              </a:ext>
+            </a:extLst>
+          </p:cNvPr>
+          <p:cNvSpPr txBox="1"/>
+          <p:nvPr/>
+        </p:nvSpPr>
+        <p:spPr>
+          <a:xfrm>
+            <a:off x="4286250" y="571500"/>
+            <a:ext cx="7239000" cy="762000"/>
+          </a:xfrm>
+        </p:spPr>
+        <p:txBody>
+          <a:bodyPr wrap="square" rtlCol="0" lIns="0" tIns="0" rIns="0" bIns="0" anchor="t">
+            <a:spAutoFit/>
+          </a:bodyPr>
+          <a:lstStyle/>
+          <a:p>
+            <a:pPr>
+              <a:spcAft>
+                <a:spcPts val="400"/>
+              </a:spcAft>
+            </a:pPr>
+            <a:r>
+              <a:rPr sz="1900" b="1">
+                <a:solidFill>
+                  <a:srgbClr val="E8742A"/>
+                </a:solidFill>
+              </a:rPr>
+              <a:t>SMF 沒送 N1N2</a:t>
+            </a:r>
+          </a:p>
+          <a:p>
+            <a:r>
+              <a:rPr sz="1500">
+                <a:solidFill>
+                  <a:srgbClr val="5B6575"/>
+                </a:solidFill>
+              </a:rPr>
+              <a:t>policy 更新只改 UPF，gNB 與 UE 不知道語音 QoS flow</a:t>
+            </a:r>
+          </a:p>
+        </p:txBody>
+      </p:sp>
+      <p:sp>
+        <p:nvSpPr>
+          <p:cNvPr id="7" name="Shape 7">
+            <a:extLst>
+              <a:ext uri="{FF2B5EF4-FFF2-40B4-BE49-F238E27FC236}">
+                <a16:creationId xmlns:a16="http://schemas.microsoft.com/office/drawing/2014/main" id="{CEF2B108-67A0-4837-B2A7-EECC80E857EF}"/>
+              </a:ext>
+            </a:extLst>
+          </p:cNvPr>
+          <p:cNvSpPr/>
+          <p:nvPr/>
+        </p:nvSpPr>
+        <p:spPr>
+          <a:xfrm>
+            <a:off x="4286250" y="1409700"/>
+            <a:ext cx="7239000" cy="9525"/>
+          </a:xfrm>
+          <a:prstGeom prst="rect">
+            <a:avLst/>
+          </a:prstGeom>
+          <a:solidFill>
+            <a:srgbClr val="D5DAE1"/>
+          </a:solidFill>
+        </p:spPr>
+        <p:txBody>
+          <a:bodyPr wrap="square" rtlCol="0"/>
+          <a:lstStyle/>
+          <a:p>
+            <a:r>
+              <a:rPr/>
+              <a:t/>
+            </a:r>
+          </a:p>
+        </p:txBody>
+      </p:sp>
+      <p:sp>
+        <p:nvSpPr>
+          <p:cNvPr id="8" name="TextBox 8">
+            <a:extLst>
+              <a:ext uri="{FF2B5EF4-FFF2-40B4-BE49-F238E27FC236}">
+                <a16:creationId xmlns:a16="http://schemas.microsoft.com/office/drawing/2014/main" id="{8910FC2E-0A85-4294-BD25-788A276E4CA5}"/>
+              </a:ext>
+            </a:extLst>
+          </p:cNvPr>
+          <p:cNvSpPr txBox="1"/>
+          <p:nvPr/>
+        </p:nvSpPr>
+        <p:spPr>
+          <a:xfrm>
+            <a:off x="4286250" y="1524000"/>
+            <a:ext cx="7239000" cy="762000"/>
+          </a:xfrm>
+        </p:spPr>
+        <p:txBody>
+          <a:bodyPr wrap="square" rtlCol="0" lIns="0" tIns="0" rIns="0" bIns="0" anchor="t">
+            <a:spAutoFit/>
+          </a:bodyPr>
+          <a:lstStyle/>
+          <a:p>
+            <a:pPr>
+              <a:spcAft>
+                <a:spcPts val="400"/>
+              </a:spcAft>
+            </a:pPr>
+            <a:r>
+              <a:rPr sz="1900" b="1">
+                <a:solidFill>
+                  <a:srgbClr val="E8742A"/>
+                </a:solidFill>
+              </a:rPr>
+              <a:t>PCF 終止通知收不到</a:t>
+            </a:r>
+          </a:p>
+          <a:p>
+            <a:r>
+              <a:rPr sz="1500">
+                <a:solidFill>
+                  <a:srgbClr val="5B6575"/>
+                </a:solidFill>
+              </a:rPr>
+              <a:t>送到 /notify/terminate，shim 回 404；通話還掛著</a:t>
+            </a:r>
+          </a:p>
+        </p:txBody>
+      </p:sp>
+      <p:sp>
+        <p:nvSpPr>
+          <p:cNvPr id="9" name="Shape 9">
+            <a:extLst>
+              <a:ext uri="{FF2B5EF4-FFF2-40B4-BE49-F238E27FC236}">
+                <a16:creationId xmlns:a16="http://schemas.microsoft.com/office/drawing/2014/main" id="{98C1EE20-DA36-43EF-BF57-09D5093E1441}"/>
+              </a:ext>
+            </a:extLst>
+          </p:cNvPr>
+          <p:cNvSpPr/>
+          <p:nvPr/>
+        </p:nvSpPr>
+        <p:spPr>
+          <a:xfrm>
+            <a:off x="4286250" y="2362200"/>
+            <a:ext cx="7239000" cy="9525"/>
+          </a:xfrm>
+          <a:prstGeom prst="rect">
+            <a:avLst/>
+          </a:prstGeom>
+          <a:solidFill>
+            <a:srgbClr val="D5DAE1"/>
+          </a:solidFill>
+        </p:spPr>
+        <p:txBody>
+          <a:bodyPr wrap="square" rtlCol="0"/>
+          <a:lstStyle/>
+          <a:p>
+            <a:r>
+              <a:rPr/>
+              <a:t/>
+            </a:r>
+          </a:p>
+        </p:txBody>
+      </p:sp>
+      <p:sp>
+        <p:nvSpPr>
+          <p:cNvPr id="10" name="TextBox 10">
+            <a:extLst>
+              <a:ext uri="{FF2B5EF4-FFF2-40B4-BE49-F238E27FC236}">
+                <a16:creationId xmlns:a16="http://schemas.microsoft.com/office/drawing/2014/main" id="{3D6BC32F-DF9C-4BCD-8864-EC28A80CB180}"/>
+              </a:ext>
+            </a:extLst>
+          </p:cNvPr>
+          <p:cNvSpPr txBox="1"/>
+          <p:nvPr/>
+        </p:nvSpPr>
+        <p:spPr>
+          <a:xfrm>
+            <a:off x="4286250" y="2476500"/>
+            <a:ext cx="7239000" cy="762000"/>
+          </a:xfrm>
+        </p:spPr>
+        <p:txBody>
+          <a:bodyPr wrap="square" rtlCol="0" lIns="0" tIns="0" rIns="0" bIns="0" anchor="t">
+            <a:spAutoFit/>
+          </a:bodyPr>
+          <a:lstStyle/>
+          <a:p>
+            <a:pPr>
+              <a:spcAft>
+                <a:spcPts val="400"/>
+              </a:spcAft>
+            </a:pPr>
+            <a:r>
+              <a:rPr sz="1900" b="1">
+                <a:solidFill>
+                  <a:srgbClr val="14213D"/>
+                </a:solidFill>
+              </a:rPr>
+              <a:t>註冊時沒交換資訊</a:t>
+            </a:r>
+          </a:p>
+          <a:p>
+            <a:r>
+              <a:rPr sz="1500">
+                <a:solidFill>
+                  <a:srgbClr val="5B6575"/>
+                </a:solidFill>
+              </a:rPr>
+              <a:t>沒有信令 flow、事件訂閱（29.513 B.5–B.8）</a:t>
+            </a:r>
+          </a:p>
+        </p:txBody>
+      </p:sp>
+      <p:sp>
+        <p:nvSpPr>
+          <p:cNvPr id="11" name="Shape 11">
+            <a:extLst>
+              <a:ext uri="{FF2B5EF4-FFF2-40B4-BE49-F238E27FC236}">
+                <a16:creationId xmlns:a16="http://schemas.microsoft.com/office/drawing/2014/main" id="{069E3180-8FC4-4C0E-A2C3-F0BF133D7A79}"/>
+              </a:ext>
+            </a:extLst>
+          </p:cNvPr>
+          <p:cNvSpPr/>
+          <p:nvPr/>
+        </p:nvSpPr>
+        <p:spPr>
+          <a:xfrm>
+            <a:off x="4286250" y="3314700"/>
+            <a:ext cx="7239000" cy="9525"/>
+          </a:xfrm>
+          <a:prstGeom prst="rect">
+            <a:avLst/>
+          </a:prstGeom>
+          <a:solidFill>
+            <a:srgbClr val="D5DAE1"/>
+          </a:solidFill>
+        </p:spPr>
+        <p:txBody>
+          <a:bodyPr wrap="square" rtlCol="0"/>
+          <a:lstStyle/>
+          <a:p>
+            <a:r>
+              <a:rPr/>
+              <a:t/>
+            </a:r>
+          </a:p>
+        </p:txBody>
+      </p:sp>
+      <p:sp>
+        <p:nvSpPr>
+          <p:cNvPr id="12" name="TextBox 12">
+            <a:extLst>
+              <a:ext uri="{FF2B5EF4-FFF2-40B4-BE49-F238E27FC236}">
+                <a16:creationId xmlns:a16="http://schemas.microsoft.com/office/drawing/2014/main" id="{FEC0C6A8-5B71-4371-9942-194067C09200}"/>
+              </a:ext>
+            </a:extLst>
+          </p:cNvPr>
+          <p:cNvSpPr txBox="1"/>
+          <p:nvPr/>
+        </p:nvSpPr>
+        <p:spPr>
+          <a:xfrm>
+            <a:off x="4286250" y="3429000"/>
+            <a:ext cx="7239000" cy="762000"/>
+          </a:xfrm>
+        </p:spPr>
+        <p:txBody>
+          <a:bodyPr wrap="square" rtlCol="0" lIns="0" tIns="0" rIns="0" bIns="0" anchor="t">
+            <a:spAutoFit/>
+          </a:bodyPr>
+          <a:lstStyle/>
+          <a:p>
+            <a:pPr>
+              <a:spcAft>
+                <a:spcPts val="400"/>
+              </a:spcAft>
+            </a:pPr>
+            <a:r>
+              <a:rPr sz="1900" b="1">
+                <a:solidFill>
+                  <a:srgbClr val="14213D"/>
+                </a:solidFill>
+              </a:rPr>
+              <a:t>AMF imsVoPS = 0</a:t>
+            </a:r>
+          </a:p>
+          <a:p>
+            <a:r>
+              <a:rPr sz="1500">
+                <a:solidFill>
+                  <a:srgbClr val="5B6575"/>
+                </a:solidFill>
+              </a:rPr>
+              <a:t>網路告訴 UE 不支援 IMS 語音</a:t>
+            </a:r>
+          </a:p>
+        </p:txBody>
+      </p:sp>
+      <p:sp>
+        <p:nvSpPr>
+          <p:cNvPr id="13" name="Shape 13">
+            <a:extLst>
+              <a:ext uri="{FF2B5EF4-FFF2-40B4-BE49-F238E27FC236}">
+                <a16:creationId xmlns:a16="http://schemas.microsoft.com/office/drawing/2014/main" id="{54A8BD40-7383-4026-A70F-38A3D1A71EF8}"/>
+              </a:ext>
+            </a:extLst>
+          </p:cNvPr>
+          <p:cNvSpPr/>
+          <p:nvPr/>
+        </p:nvSpPr>
+        <p:spPr>
+          <a:xfrm>
+            <a:off x="4286250" y="4267200"/>
+            <a:ext cx="7239000" cy="9525"/>
+          </a:xfrm>
+          <a:prstGeom prst="rect">
+            <a:avLst/>
+          </a:prstGeom>
+          <a:solidFill>
+            <a:srgbClr val="D5DAE1"/>
+          </a:solidFill>
+        </p:spPr>
+        <p:txBody>
+          <a:bodyPr wrap="square" rtlCol="0"/>
+          <a:lstStyle/>
+          <a:p>
+            <a:r>
+              <a:rPr/>
+              <a:t/>
+            </a:r>
+          </a:p>
+        </p:txBody>
+      </p:sp>
+      <p:sp>
+        <p:nvSpPr>
+          <p:cNvPr id="14" name="TextBox 14">
+            <a:extLst>
+              <a:ext uri="{FF2B5EF4-FFF2-40B4-BE49-F238E27FC236}">
+                <a16:creationId xmlns:a16="http://schemas.microsoft.com/office/drawing/2014/main" id="{D0C2748F-4C4B-40AF-8CBC-DA32C486155A}"/>
+              </a:ext>
+            </a:extLst>
+          </p:cNvPr>
+          <p:cNvSpPr txBox="1"/>
+          <p:nvPr/>
+        </p:nvSpPr>
+        <p:spPr>
+          <a:xfrm>
+            <a:off x="4286250" y="4381500"/>
+            <a:ext cx="7239000" cy="762000"/>
+          </a:xfrm>
+        </p:spPr>
+        <p:txBody>
+          <a:bodyPr wrap="square" rtlCol="0" lIns="0" tIns="0" rIns="0" bIns="0" anchor="t">
+            <a:spAutoFit/>
+          </a:bodyPr>
+          <a:lstStyle/>
+          <a:p>
+            <a:pPr>
+              <a:spcAft>
+                <a:spcPts val="400"/>
+              </a:spcAft>
+            </a:pPr>
+            <a:r>
+              <a:rPr sz="1900" b="1">
+                <a:solidFill>
+                  <a:srgbClr val="14213D"/>
+                </a:solidFill>
+              </a:rPr>
+              <a:t>PCO 只有 IPv4</a:t>
+            </a:r>
+          </a:p>
+          <a:p>
+            <a:r>
+              <a:rPr sz="1500">
+                <a:solidFill>
+                  <a:srgbClr val="5B6575"/>
+                </a:solidFill>
+              </a:rPr>
+              <a:t>沒有 IPv6 P-CSCF</a:t>
+            </a:r>
+          </a:p>
+        </p:txBody>
+      </p:sp>
+      <p:sp>
+        <p:nvSpPr>
+          <p:cNvPr id="15" name="Shape 15">
+            <a:extLst>
+              <a:ext uri="{FF2B5EF4-FFF2-40B4-BE49-F238E27FC236}">
+                <a16:creationId xmlns:a16="http://schemas.microsoft.com/office/drawing/2014/main" id="{99F9807D-AED6-4779-B66C-0625848BC5DD}"/>
+              </a:ext>
+            </a:extLst>
+          </p:cNvPr>
+          <p:cNvSpPr/>
+          <p:nvPr/>
+        </p:nvSpPr>
+        <p:spPr>
+          <a:xfrm>
+            <a:off x="4286250" y="5219700"/>
+            <a:ext cx="7239000" cy="9525"/>
+          </a:xfrm>
+          <a:prstGeom prst="rect">
+            <a:avLst/>
+          </a:prstGeom>
+          <a:solidFill>
+            <a:srgbClr val="D5DAE1"/>
+          </a:solidFill>
+        </p:spPr>
+        <p:txBody>
+          <a:bodyPr wrap="square" rtlCol="0"/>
+          <a:lstStyle/>
+          <a:p>
+            <a:r>
+              <a:rPr/>
+              <a:t/>
+            </a:r>
+          </a:p>
+        </p:txBody>
+      </p:sp>
+      <p:sp>
+        <p:nvSpPr>
+          <p:cNvPr id="16" name="TextBox 16">
+            <a:extLst>
+              <a:ext uri="{FF2B5EF4-FFF2-40B4-BE49-F238E27FC236}">
+                <a16:creationId xmlns:a16="http://schemas.microsoft.com/office/drawing/2014/main" id="{C6FC03EC-3061-4CB3-A09C-ED7FEB8309DF}"/>
+              </a:ext>
+            </a:extLst>
+          </p:cNvPr>
+          <p:cNvSpPr txBox="1"/>
+          <p:nvPr/>
+        </p:nvSpPr>
+        <p:spPr>
+          <a:xfrm>
+            <a:off x="4286250" y="5334000"/>
+            <a:ext cx="7239000" cy="762000"/>
+          </a:xfrm>
+        </p:spPr>
+        <p:txBody>
+          <a:bodyPr wrap="square" rtlCol="0" lIns="0" tIns="0" rIns="0" bIns="0" anchor="t">
+            <a:spAutoFit/>
+          </a:bodyPr>
+          <a:lstStyle/>
+          <a:p>
+            <a:pPr>
+              <a:spcAft>
+                <a:spcPts val="400"/>
+              </a:spcAft>
+            </a:pPr>
+            <a:r>
+              <a:rPr sz="1900" b="1">
+                <a:solidFill>
+                  <a:srgbClr val="14213D"/>
+                </a:solidFill>
+              </a:rPr>
+              <a:t>QER 不真的限速</a:t>
+            </a:r>
+          </a:p>
+          <a:p>
+            <a:r>
+              <a:rPr sz="1500">
+                <a:solidFill>
+                  <a:srgbClr val="5B6575"/>
+                </a:solidFill>
+              </a:rPr>
+              <a:t>free5gc 的已知限制</a:t>
             </a:r>
           </a:p>
         </p:txBody>
